--- a/Development_D3/Guided_Practice/D3-L03_Practice_Room_Skills_and_Qualities.pptx
+++ b/Development_D3/Guided_Practice/D3-L03_Practice_Room_Skills_and_Qualities.pptx
@@ -12269,11 +12269,11 @@
           <a:bodyPr wrap="square" lIns="0" tIns="0" rIns="0" bIns="0" rtlCol="0" anchor="ctr"/>
           <a:lstStyle/>
           <a:p>
-            <a:pPr algn="l" indent="0" marL="0">
-              <a:buNone/>
-            </a:pPr>
-            <a:r>
-              <a:rPr lang="ar-SA" altLang="en-US" sz="3900" b="1" dirty="0">
+            <a:pPr rtl="1" algn="r" indent="0" marL="0">
+              <a:buNone/>
+            </a:pPr>
+            <a:r>
+              <a:rPr lang="ar-SA" altLang="en-US" sz="3000" b="1" dirty="0">
                 <a:solidFill>
                   <a:srgbClr val="B83227"/>
                 </a:solidFill>
@@ -12281,22 +12281,9 @@
                 <a:ea typeface="Amiri" pitchFamily="2" charset="-78"/>
                 <a:cs typeface="Amiri" pitchFamily="2" charset="-78"/>
               </a:rPr>
-              <a:t>أَنَا مَسْؤُولٌ</a:t>
-            </a:r>
-            <a:pPr algn="l" indent="0" marL="0">
-              <a:buNone/>
-            </a:pPr>
-            <a:r>
-              <a:rPr lang="en-US" sz="3000" b="1" dirty="0">
-                <a:solidFill>
-                  <a:srgbClr val="B83227"/>
-                </a:solidFill>
-                <a:latin typeface="Calibri" pitchFamily="34" charset="0"/>
-                <a:cs typeface="Amiri" pitchFamily="2" charset="-78"/>
-              </a:rPr>
-              <a:t>. (no proof)</a:t>
-            </a:r>
-            <a:endParaRPr lang="en-US" sz="3000" dirty="0"/>
+              <a:t>أَنَا مَسْؤُولٌ.</a:t>
+            </a:r>
+            <a:endParaRPr lang="ar-SA" sz="3000" dirty="0"/>
           </a:p>
         </p:txBody>
       </p:sp>
@@ -13323,11 +13310,11 @@
           <a:bodyPr wrap="square" lIns="0" tIns="0" rIns="0" bIns="0" rtlCol="0" anchor="ctr"/>
           <a:lstStyle/>
           <a:p>
-            <a:pPr algn="l" indent="0" marL="0">
-              <a:buNone/>
-            </a:pPr>
-            <a:r>
-              <a:rPr lang="ar-SA" altLang="en-US" sz="2350" dirty="0">
+            <a:pPr rtl="1" algn="r" indent="0" marL="0">
+              <a:buNone/>
+            </a:pPr>
+            <a:r>
+              <a:rPr lang="ar-SA" altLang="en-US" sz="1800" b="1" dirty="0">
                 <a:solidFill>
                   <a:srgbClr val="B83227"/>
                 </a:solidFill>
@@ -13335,22 +13322,9 @@
                 <a:ea typeface="Amiri" pitchFamily="2" charset="-78"/>
                 <a:cs typeface="Amiri" pitchFamily="2" charset="-78"/>
               </a:rPr>
-              <a:t>أَنَا مَسْؤُولٌ</a:t>
-            </a:r>
-            <a:pPr algn="l" indent="0" marL="0">
-              <a:buNone/>
-            </a:pPr>
-            <a:r>
-              <a:rPr lang="en-US" sz="1800" dirty="0">
-                <a:solidFill>
-                  <a:srgbClr val="B83227"/>
-                </a:solidFill>
-                <a:latin typeface="Calibri" pitchFamily="34" charset="0"/>
-                <a:cs typeface="Amiri" pitchFamily="2" charset="-78"/>
-              </a:rPr>
-              <a:t>. (no proof)</a:t>
-            </a:r>
-            <a:endParaRPr lang="en-US" sz="1800" dirty="0"/>
+              <a:t>أَنَا مَسْؤُولٌ.</a:t>
+            </a:r>
+            <a:endParaRPr lang="ar-SA" sz="1800" dirty="0"/>
           </a:p>
         </p:txBody>
       </p:sp>
@@ -14738,11 +14712,11 @@
           <a:bodyPr wrap="square" lIns="0" tIns="0" rIns="0" bIns="0" rtlCol="0" anchor="ctr"/>
           <a:lstStyle/>
           <a:p>
-            <a:pPr algn="l" indent="0" marL="0">
-              <a:buNone/>
-            </a:pPr>
-            <a:r>
-              <a:rPr lang="ar-SA" altLang="en-US" sz="2000" b="1" dirty="0">
+            <a:pPr rtl="1" algn="r" indent="0" marL="0">
+              <a:buNone/>
+            </a:pPr>
+            <a:r>
+              <a:rPr lang="ar-SA" altLang="en-US" sz="1600" b="1" dirty="0">
                 <a:solidFill>
                   <a:srgbClr val="1B3B6F"/>
                 </a:solidFill>
@@ -14750,265 +14724,9 @@
                 <a:ea typeface="Amiri" pitchFamily="2" charset="-78"/>
                 <a:cs typeface="Amiri" pitchFamily="2" charset="-78"/>
               </a:rPr>
-              <a:t>مَهَارَةُ التَّوَاصُلِ</a:t>
-            </a:r>
-            <a:pPr algn="l" indent="0" marL="0">
-              <a:buNone/>
-            </a:pPr>
-            <a:r>
-              <a:rPr lang="en-US" sz="1550" b="1" dirty="0">
-                <a:solidFill>
-                  <a:srgbClr val="1B3B6F"/>
-                </a:solidFill>
-                <a:latin typeface="Calibri" pitchFamily="34" charset="0"/>
-                <a:cs typeface="Amiri" pitchFamily="2" charset="-78"/>
-              </a:rPr>
-              <a:t>  ·  </a:t>
-            </a:r>
-            <a:pPr algn="l" indent="0" marL="0">
-              <a:buNone/>
-            </a:pPr>
-            <a:r>
-              <a:rPr lang="ar-SA" altLang="en-US" sz="2000" b="1" dirty="0">
-                <a:solidFill>
-                  <a:srgbClr val="1B3B6F"/>
-                </a:solidFill>
-                <a:latin typeface="Amiri" pitchFamily="2" charset="-78"/>
-                <a:ea typeface="Amiri" pitchFamily="2" charset="-78"/>
-                <a:cs typeface="Amiri" pitchFamily="2" charset="-78"/>
-              </a:rPr>
-              <a:t>حَلُّ المُشْكِلَاتِ</a:t>
-            </a:r>
-            <a:pPr algn="l" indent="0" marL="0">
-              <a:buNone/>
-            </a:pPr>
-            <a:r>
-              <a:rPr lang="en-US" sz="1550" b="1" dirty="0">
-                <a:solidFill>
-                  <a:srgbClr val="1B3B6F"/>
-                </a:solidFill>
-                <a:latin typeface="Calibri" pitchFamily="34" charset="0"/>
-                <a:cs typeface="Amiri" pitchFamily="2" charset="-78"/>
-              </a:rPr>
-              <a:t>  ·  </a:t>
-            </a:r>
-            <a:pPr algn="l" indent="0" marL="0">
-              <a:buNone/>
-            </a:pPr>
-            <a:r>
-              <a:rPr lang="ar-SA" altLang="en-US" sz="2000" b="1" dirty="0">
-                <a:solidFill>
-                  <a:srgbClr val="1B3B6F"/>
-                </a:solidFill>
-                <a:latin typeface="Amiri" pitchFamily="2" charset="-78"/>
-                <a:ea typeface="Amiri" pitchFamily="2" charset="-78"/>
-                <a:cs typeface="Amiri" pitchFamily="2" charset="-78"/>
-              </a:rPr>
-              <a:t>العَمَلُ الجَمَاعِيُّ</a:t>
-            </a:r>
-            <a:pPr algn="l" indent="0" marL="0">
-              <a:buNone/>
-            </a:pPr>
-            <a:r>
-              <a:rPr lang="en-US" sz="1550" b="1" dirty="0">
-                <a:solidFill>
-                  <a:srgbClr val="1B3B6F"/>
-                </a:solidFill>
-                <a:latin typeface="Calibri" pitchFamily="34" charset="0"/>
-                <a:cs typeface="Amiri" pitchFamily="2" charset="-78"/>
-              </a:rPr>
-              <a:t>  ·  </a:t>
-            </a:r>
-            <a:pPr algn="l" indent="0" marL="0">
-              <a:buNone/>
-            </a:pPr>
-            <a:r>
-              <a:rPr lang="ar-SA" altLang="en-US" sz="2000" b="1" dirty="0">
-                <a:solidFill>
-                  <a:srgbClr val="1B3B6F"/>
-                </a:solidFill>
-                <a:latin typeface="Amiri" pitchFamily="2" charset="-78"/>
-                <a:ea typeface="Amiri" pitchFamily="2" charset="-78"/>
-                <a:cs typeface="Amiri" pitchFamily="2" charset="-78"/>
-              </a:rPr>
-              <a:t>إِدَارَةُ الوَقْتِ</a:t>
-            </a:r>
-            <a:pPr algn="l" indent="0" marL="0">
-              <a:buNone/>
-            </a:pPr>
-            <a:r>
-              <a:rPr lang="en-US" sz="1550" b="1" dirty="0">
-                <a:solidFill>
-                  <a:srgbClr val="1B3B6F"/>
-                </a:solidFill>
-                <a:latin typeface="Calibri" pitchFamily="34" charset="0"/>
-                <a:cs typeface="Amiri" pitchFamily="2" charset="-78"/>
-              </a:rPr>
-              <a:t>  ·  </a:t>
-            </a:r>
-            <a:pPr algn="l" indent="0" marL="0">
-              <a:buNone/>
-            </a:pPr>
-            <a:r>
-              <a:rPr lang="ar-SA" altLang="en-US" sz="2000" b="1" dirty="0">
-                <a:solidFill>
-                  <a:srgbClr val="1B3B6F"/>
-                </a:solidFill>
-                <a:latin typeface="Amiri" pitchFamily="2" charset="-78"/>
-                <a:ea typeface="Amiri" pitchFamily="2" charset="-78"/>
-                <a:cs typeface="Amiri" pitchFamily="2" charset="-78"/>
-              </a:rPr>
-              <a:t>مَسْؤُولٌ</a:t>
-            </a:r>
-            <a:pPr algn="l" indent="0" marL="0">
-              <a:buNone/>
-            </a:pPr>
-            <a:r>
-              <a:rPr lang="en-US" sz="1550" b="1" dirty="0">
-                <a:solidFill>
-                  <a:srgbClr val="1B3B6F"/>
-                </a:solidFill>
-                <a:latin typeface="Calibri" pitchFamily="34" charset="0"/>
-                <a:cs typeface="Amiri" pitchFamily="2" charset="-78"/>
-              </a:rPr>
-              <a:t> · </a:t>
-            </a:r>
-            <a:pPr algn="l" indent="0" marL="0">
-              <a:buNone/>
-            </a:pPr>
-            <a:r>
-              <a:rPr lang="ar-SA" altLang="en-US" sz="2000" b="1" dirty="0">
-                <a:solidFill>
-                  <a:srgbClr val="1B3B6F"/>
-                </a:solidFill>
-                <a:latin typeface="Amiri" pitchFamily="2" charset="-78"/>
-                <a:ea typeface="Amiri" pitchFamily="2" charset="-78"/>
-                <a:cs typeface="Amiri" pitchFamily="2" charset="-78"/>
-              </a:rPr>
-              <a:t>مَسْؤُولَةٌ</a:t>
-            </a:r>
-            <a:pPr algn="l" indent="0" marL="0">
-              <a:buNone/>
-            </a:pPr>
-            <a:r>
-              <a:rPr lang="en-US" sz="1550" b="1" dirty="0">
-                <a:solidFill>
-                  <a:srgbClr val="1B3B6F"/>
-                </a:solidFill>
-                <a:latin typeface="Calibri" pitchFamily="34" charset="0"/>
-                <a:cs typeface="Amiri" pitchFamily="2" charset="-78"/>
-              </a:rPr>
-              <a:t>  ·  </a:t>
-            </a:r>
-            <a:pPr algn="l" indent="0" marL="0">
-              <a:buNone/>
-            </a:pPr>
-            <a:r>
-              <a:rPr lang="ar-SA" altLang="en-US" sz="2000" b="1" dirty="0">
-                <a:solidFill>
-                  <a:srgbClr val="1B3B6F"/>
-                </a:solidFill>
-                <a:latin typeface="Amiri" pitchFamily="2" charset="-78"/>
-                <a:ea typeface="Amiri" pitchFamily="2" charset="-78"/>
-                <a:cs typeface="Amiri" pitchFamily="2" charset="-78"/>
-              </a:rPr>
-              <a:t>مُنَظَّمٌ</a:t>
-            </a:r>
-            <a:pPr algn="l" indent="0" marL="0">
-              <a:buNone/>
-            </a:pPr>
-            <a:r>
-              <a:rPr lang="en-US" sz="1550" b="1" dirty="0">
-                <a:solidFill>
-                  <a:srgbClr val="1B3B6F"/>
-                </a:solidFill>
-                <a:latin typeface="Calibri" pitchFamily="34" charset="0"/>
-                <a:cs typeface="Amiri" pitchFamily="2" charset="-78"/>
-              </a:rPr>
-              <a:t> · </a:t>
-            </a:r>
-            <a:pPr algn="l" indent="0" marL="0">
-              <a:buNone/>
-            </a:pPr>
-            <a:r>
-              <a:rPr lang="ar-SA" altLang="en-US" sz="2000" b="1" dirty="0">
-                <a:solidFill>
-                  <a:srgbClr val="1B3B6F"/>
-                </a:solidFill>
-                <a:latin typeface="Amiri" pitchFamily="2" charset="-78"/>
-                <a:ea typeface="Amiri" pitchFamily="2" charset="-78"/>
-                <a:cs typeface="Amiri" pitchFamily="2" charset="-78"/>
-              </a:rPr>
-              <a:t>مُنَظَّمَةٌ</a:t>
-            </a:r>
-            <a:pPr algn="l" indent="0" marL="0">
-              <a:buNone/>
-            </a:pPr>
-            <a:r>
-              <a:rPr lang="en-US" sz="1550" b="1" dirty="0">
-                <a:solidFill>
-                  <a:srgbClr val="1B3B6F"/>
-                </a:solidFill>
-                <a:latin typeface="Calibri" pitchFamily="34" charset="0"/>
-                <a:cs typeface="Amiri" pitchFamily="2" charset="-78"/>
-              </a:rPr>
-              <a:t>  ·  </a:t>
-            </a:r>
-            <a:pPr algn="l" indent="0" marL="0">
-              <a:buNone/>
-            </a:pPr>
-            <a:r>
-              <a:rPr lang="ar-SA" altLang="en-US" sz="2000" b="1" dirty="0">
-                <a:solidFill>
-                  <a:srgbClr val="1B3B6F"/>
-                </a:solidFill>
-                <a:latin typeface="Amiri" pitchFamily="2" charset="-78"/>
-                <a:ea typeface="Amiri" pitchFamily="2" charset="-78"/>
-                <a:cs typeface="Amiri" pitchFamily="2" charset="-78"/>
-              </a:rPr>
-              <a:t>يَحْتَاجُ إِلَى</a:t>
-            </a:r>
-            <a:pPr algn="l" indent="0" marL="0">
-              <a:buNone/>
-            </a:pPr>
-            <a:r>
-              <a:rPr lang="en-US" sz="1550" b="1" dirty="0">
-                <a:solidFill>
-                  <a:srgbClr val="1B3B6F"/>
-                </a:solidFill>
-                <a:latin typeface="Calibri" pitchFamily="34" charset="0"/>
-                <a:cs typeface="Amiri" pitchFamily="2" charset="-78"/>
-              </a:rPr>
-              <a:t>  ·  </a:t>
-            </a:r>
-            <a:pPr algn="l" indent="0" marL="0">
-              <a:buNone/>
-            </a:pPr>
-            <a:r>
-              <a:rPr lang="ar-SA" altLang="en-US" sz="2000" b="1" dirty="0">
-                <a:solidFill>
-                  <a:srgbClr val="1B3B6F"/>
-                </a:solidFill>
-                <a:latin typeface="Amiri" pitchFamily="2" charset="-78"/>
-                <a:ea typeface="Amiri" pitchFamily="2" charset="-78"/>
-                <a:cs typeface="Amiri" pitchFamily="2" charset="-78"/>
-              </a:rPr>
-              <a:t>يَجِبُ أَنْ يَكُونَ</a:t>
-            </a:r>
-            <a:pPr algn="l" indent="0" marL="0">
-              <a:buNone/>
-            </a:pPr>
-            <a:r>
-              <a:rPr lang="en-US" sz="1550" b="1" dirty="0">
-                <a:solidFill>
-                  <a:srgbClr val="1B3B6F"/>
-                </a:solidFill>
-                <a:latin typeface="Calibri" pitchFamily="34" charset="0"/>
-                <a:cs typeface="Amiri" pitchFamily="2" charset="-78"/>
-              </a:rPr>
-              <a:t> + -an</a:t>
-            </a:r>
-            <a:endParaRPr lang="en-US" sz="1550" dirty="0"/>
+              <a:t>مَهَارَةُ التَّوَاصُلِ  ·  حَلُّ المُشْكِلَاتِ  ·  العَمَلُ الجَمَاعِيُّ  ·  إِدَارَةُ الوَقْتِ  ·  مَسْؤُولٌ · مَسْؤُولَةٌ  ·  مُنَظَّمٌ · مُنَظَّمَةٌ  ·  يَحْتَاجُ إِلَى  ·  يَجِبُ أَنْ يَكُونَ صَبُورًا</a:t>
+            </a:r>
+            <a:endParaRPr lang="ar-SA" sz="1600" dirty="0"/>
           </a:p>
         </p:txBody>
       </p:sp>
